--- a/112111119_賴俊升.pptx
+++ b/112111119_賴俊升.pptx
@@ -1815,7 +1815,7 @@
         </p:nvSpPr>
         <p:spPr>
           <a:xfrm>
-            <a:off x="1897552" y="3497817"/>
+            <a:off x="1792042" y="3497817"/>
             <a:ext cx="1106457" cy="268279"/>
           </a:xfrm>
           <a:prstGeom prst="rect">
@@ -4188,7 +4188,7 @@
         <p:spPr>
           <a:xfrm>
             <a:off x="428625" y="1527395"/>
-            <a:ext cx="4929188" cy="771525"/>
+            <a:ext cx="4929188" cy="706668"/>
           </a:xfrm>
           <a:prstGeom prst="rect">
             <a:avLst/>
@@ -4209,7 +4209,7 @@
               <a:buNone/>
             </a:pPr>
             <a:r>
-              <a:rPr lang="en-US" sz="1050" dirty="0">
+              <a:rPr lang="en-US" sz="1100" dirty="0">
                 <a:solidFill>
                   <a:srgbClr val="FFFFFF">
                     <a:alpha val="90000"/>
@@ -4221,7 +4221,7 @@
               </a:rPr>
               <a:t>台灣通訊系統高度依賴地面基地台與海底電纜，一旦面臨天然災害或人為蓄意破壞，基礎設施極易失效。本研究旨在評估低軌衛星（LEO）作為「多層次通訊架構」中關鍵備援方案的可行性。</a:t>
             </a:r>
-            <a:endParaRPr lang="en-US" sz="1050" dirty="0"/>
+            <a:endParaRPr lang="en-US" sz="1100" dirty="0"/>
           </a:p>
         </p:txBody>
       </p:sp>
@@ -6359,7 +6359,7 @@
         <p:spPr>
           <a:xfrm>
             <a:off x="642938" y="2404290"/>
-            <a:ext cx="3500438" cy="388609"/>
+            <a:ext cx="3500438" cy="517193"/>
           </a:xfrm>
           <a:prstGeom prst="rect">
             <a:avLst/>
@@ -6380,7 +6380,7 @@
               <a:buNone/>
             </a:pPr>
             <a:r>
-              <a:rPr lang="en-US" sz="900" dirty="0">
+              <a:rPr lang="en-US" sz="900" dirty="0" err="1">
                 <a:solidFill>
                   <a:srgbClr val="FFFFFF">
                     <a:alpha val="80000"/>
@@ -6390,7 +6390,111 @@
                 <a:ea typeface="Inter" pitchFamily="34" charset="-122"/>
                 <a:cs typeface="Inter" pitchFamily="34" charset="-120"/>
               </a:rPr>
-              <a:t>外資持股比例限制、頻譜使用授權及地面站建置規範等現行法規要求。</a:t>
+              <a:t>外資持股比例限制</a:t>
+            </a:r>
+            <a:r>
+              <a:rPr lang="en-US" altLang="zh-TW" sz="900" dirty="0">
+                <a:solidFill>
+                  <a:srgbClr val="FFFFFF">
+                    <a:alpha val="80000"/>
+                  </a:srgbClr>
+                </a:solidFill>
+                <a:latin typeface="Inter" pitchFamily="34" charset="0"/>
+                <a:ea typeface="Inter" pitchFamily="34" charset="-122"/>
+                <a:cs typeface="Inter" pitchFamily="34" charset="-120"/>
+              </a:rPr>
+              <a:t>(</a:t>
+            </a:r>
+            <a:r>
+              <a:rPr lang="zh-TW" altLang="en-US" sz="900" dirty="0">
+                <a:solidFill>
+                  <a:srgbClr val="FFFFFF">
+                    <a:alpha val="80000"/>
+                  </a:srgbClr>
+                </a:solidFill>
+                <a:latin typeface="Inter" pitchFamily="34" charset="0"/>
+                <a:ea typeface="Inter" pitchFamily="34" charset="-122"/>
+                <a:cs typeface="Inter" pitchFamily="34" charset="-120"/>
+              </a:rPr>
+              <a:t>直接持有</a:t>
+            </a:r>
+            <a:r>
+              <a:rPr lang="en-US" altLang="zh-TW" sz="900" dirty="0">
+                <a:solidFill>
+                  <a:srgbClr val="FFFFFF">
+                    <a:alpha val="80000"/>
+                  </a:srgbClr>
+                </a:solidFill>
+                <a:latin typeface="Inter" pitchFamily="34" charset="0"/>
+                <a:ea typeface="Inter" pitchFamily="34" charset="-122"/>
+                <a:cs typeface="Inter" pitchFamily="34" charset="-120"/>
+              </a:rPr>
+              <a:t>49%</a:t>
+            </a:r>
+            <a:r>
+              <a:rPr lang="zh-TW" altLang="en-US" sz="900" dirty="0">
+                <a:solidFill>
+                  <a:srgbClr val="FFFFFF">
+                    <a:alpha val="80000"/>
+                  </a:srgbClr>
+                </a:solidFill>
+                <a:latin typeface="Inter" pitchFamily="34" charset="0"/>
+                <a:ea typeface="Inter" pitchFamily="34" charset="-122"/>
+                <a:cs typeface="Inter" pitchFamily="34" charset="-120"/>
+              </a:rPr>
+              <a:t>、間接持有</a:t>
+            </a:r>
+            <a:r>
+              <a:rPr lang="en-US" altLang="zh-TW" sz="900" dirty="0">
+                <a:solidFill>
+                  <a:srgbClr val="FFFFFF">
+                    <a:alpha val="80000"/>
+                  </a:srgbClr>
+                </a:solidFill>
+                <a:latin typeface="Inter" pitchFamily="34" charset="0"/>
+                <a:ea typeface="Inter" pitchFamily="34" charset="-122"/>
+                <a:cs typeface="Inter" pitchFamily="34" charset="-120"/>
+              </a:rPr>
+              <a:t>60%</a:t>
+            </a:r>
+            <a:r>
+              <a:rPr lang="zh-TW" altLang="en-US" sz="900" dirty="0">
+                <a:solidFill>
+                  <a:srgbClr val="FFFFFF">
+                    <a:alpha val="80000"/>
+                  </a:srgbClr>
+                </a:solidFill>
+                <a:latin typeface="Inter" pitchFamily="34" charset="0"/>
+                <a:ea typeface="Inter" pitchFamily="34" charset="-122"/>
+                <a:cs typeface="Inter" pitchFamily="34" charset="-120"/>
+              </a:rPr>
+              <a:t>，且公司董事長應具有中華民國國籍</a:t>
+            </a:r>
+            <a:r>
+              <a:rPr lang="en-US" altLang="zh-TW" sz="900" dirty="0">
+                <a:solidFill>
+                  <a:srgbClr val="FFFFFF">
+                    <a:alpha val="80000"/>
+                  </a:srgbClr>
+                </a:solidFill>
+                <a:latin typeface="Inter" pitchFamily="34" charset="0"/>
+                <a:ea typeface="Inter" pitchFamily="34" charset="-122"/>
+                <a:cs typeface="Inter" pitchFamily="34" charset="-120"/>
+              </a:rPr>
+              <a:t>)</a:t>
+            </a:r>
+            <a:r>
+              <a:rPr lang="en-US" sz="900" dirty="0">
+                <a:solidFill>
+                  <a:srgbClr val="FFFFFF">
+                    <a:alpha val="80000"/>
+                  </a:srgbClr>
+                </a:solidFill>
+                <a:latin typeface="Inter" pitchFamily="34" charset="0"/>
+                <a:ea typeface="Inter" pitchFamily="34" charset="-122"/>
+                <a:cs typeface="Inter" pitchFamily="34" charset="-120"/>
+              </a:rPr>
+              <a:t>、頻譜使用授權及地面站建置規範等現行法規要求。</a:t>
             </a:r>
             <a:endParaRPr lang="en-US" sz="900" dirty="0"/>
           </a:p>
@@ -8512,7 +8616,7 @@
         </p:blipFill>
         <p:spPr>
           <a:xfrm>
-            <a:off x="0" y="19170"/>
+            <a:off x="0" y="0"/>
             <a:ext cx="9144000" cy="5143500"/>
           </a:xfrm>
           <a:prstGeom prst="rect">
@@ -9175,7 +9279,7 @@
         </p:nvSpPr>
         <p:spPr>
           <a:xfrm>
-            <a:off x="6072188" y="2854682"/>
+            <a:off x="6072188" y="1918009"/>
             <a:ext cx="2928938" cy="785813"/>
           </a:xfrm>
           <a:prstGeom prst="rect">
@@ -9197,7 +9301,7 @@
         </p:nvSpPr>
         <p:spPr>
           <a:xfrm>
-            <a:off x="6072188" y="2854682"/>
+            <a:off x="6072188" y="1918009"/>
             <a:ext cx="2928938" cy="7144"/>
           </a:xfrm>
           <a:prstGeom prst="rect">
@@ -9217,7 +9321,7 @@
         </p:nvSpPr>
         <p:spPr>
           <a:xfrm>
-            <a:off x="6250781" y="2997557"/>
+            <a:off x="6250781" y="2060884"/>
             <a:ext cx="2750344" cy="144661"/>
           </a:xfrm>
           <a:prstGeom prst="rect">
@@ -9258,7 +9362,7 @@
         </p:nvSpPr>
         <p:spPr>
           <a:xfrm>
-            <a:off x="6250781" y="3177936"/>
+            <a:off x="6250781" y="2241263"/>
             <a:ext cx="2750344" cy="246221"/>
           </a:xfrm>
           <a:prstGeom prst="rect">
@@ -9293,35 +9397,13 @@
       </p:sp>
       <p:sp>
         <p:nvSpPr>
-          <p:cNvPr id="29" name="Shape 26"/>
-          <p:cNvSpPr/>
-          <p:nvPr/>
-        </p:nvSpPr>
-        <p:spPr>
-          <a:xfrm>
-            <a:off x="6072188" y="3783369"/>
-            <a:ext cx="2928938" cy="785813"/>
-          </a:xfrm>
-          <a:prstGeom prst="rect">
-            <a:avLst/>
-          </a:prstGeom>
-          <a:solidFill>
-            <a:srgbClr val="FFFFFF">
-              <a:alpha val="3000"/>
-            </a:srgbClr>
-          </a:solidFill>
-          <a:ln/>
-        </p:spPr>
-      </p:sp>
-      <p:sp>
-        <p:nvSpPr>
           <p:cNvPr id="30" name="Shape 27"/>
           <p:cNvSpPr/>
           <p:nvPr/>
         </p:nvSpPr>
         <p:spPr>
           <a:xfrm>
-            <a:off x="6072188" y="3783369"/>
+            <a:off x="6072188" y="2846696"/>
             <a:ext cx="2928938" cy="7144"/>
           </a:xfrm>
           <a:prstGeom prst="rect">
@@ -9341,7 +9423,7 @@
         </p:nvSpPr>
         <p:spPr>
           <a:xfrm>
-            <a:off x="6250781" y="3926244"/>
+            <a:off x="6250781" y="2989571"/>
             <a:ext cx="2750344" cy="144661"/>
           </a:xfrm>
           <a:prstGeom prst="rect">
@@ -9382,7 +9464,7 @@
         </p:nvSpPr>
         <p:spPr>
           <a:xfrm>
-            <a:off x="6250781" y="4106624"/>
+            <a:off x="6250781" y="3169951"/>
             <a:ext cx="2750344" cy="246221"/>
           </a:xfrm>
           <a:prstGeom prst="rect">
@@ -10889,7 +10971,7 @@
               <a:buNone/>
             </a:pPr>
             <a:r>
-              <a:rPr lang="en-US" dirty="0">
+              <a:rPr lang="en-US" altLang="zh-TW" dirty="0" err="1">
                 <a:solidFill>
                   <a:srgbClr val="FFFFFF">
                     <a:alpha val="60000"/>
@@ -10899,9 +10981,35 @@
                 <a:ea typeface="Inter" pitchFamily="34" charset="-122"/>
                 <a:cs typeface="Inter" pitchFamily="34" charset="-120"/>
               </a:rPr>
-              <a:t>仰角越高 ↔ 訊號越強</a:t>
-            </a:r>
-            <a:endParaRPr lang="en-US" dirty="0"/>
+              <a:t>仰角越高</a:t>
+            </a:r>
+            <a:r>
+              <a:rPr lang="en-US" altLang="zh-TW" dirty="0">
+                <a:solidFill>
+                  <a:srgbClr val="FFFFFF">
+                    <a:alpha val="60000"/>
+                  </a:srgbClr>
+                </a:solidFill>
+                <a:latin typeface="Inter" pitchFamily="34" charset="0"/>
+                <a:ea typeface="Inter" pitchFamily="34" charset="-122"/>
+                <a:cs typeface="Inter" pitchFamily="34" charset="-120"/>
+              </a:rPr>
+              <a:t> ↔ </a:t>
+            </a:r>
+            <a:r>
+              <a:rPr lang="en-US" altLang="zh-TW" dirty="0" err="1">
+                <a:solidFill>
+                  <a:srgbClr val="FFFFFF">
+                    <a:alpha val="60000"/>
+                  </a:srgbClr>
+                </a:solidFill>
+                <a:latin typeface="Inter" pitchFamily="34" charset="0"/>
+                <a:ea typeface="Inter" pitchFamily="34" charset="-122"/>
+                <a:cs typeface="Inter" pitchFamily="34" charset="-120"/>
+              </a:rPr>
+              <a:t>訊號越強</a:t>
+            </a:r>
+            <a:endParaRPr lang="en-US" altLang="zh-TW" dirty="0"/>
           </a:p>
         </p:txBody>
       </p:sp>

--- a/112111119_賴俊升.pptx
+++ b/112111119_賴俊升.pptx
@@ -5,7 +5,7 @@
     <p:sldMasterId id="2147483648" r:id="rId1"/>
   </p:sldMasterIdLst>
   <p:notesMasterIdLst>
-    <p:notesMasterId r:id="rId13"/>
+    <p:notesMasterId r:id="rId14"/>
   </p:notesMasterIdLst>
   <p:sldIdLst>
     <p:sldId id="256" r:id="rId2"/>
@@ -18,7 +18,8 @@
     <p:sldId id="264" r:id="rId9"/>
     <p:sldId id="265" r:id="rId10"/>
     <p:sldId id="266" r:id="rId11"/>
-    <p:sldId id="267" r:id="rId12"/>
+    <p:sldId id="268" r:id="rId12"/>
+    <p:sldId id="267" r:id="rId13"/>
   </p:sldIdLst>
   <p:sldSz cx="9144000" cy="5143500" type="screen16x9"/>
   <p:notesSz cx="5143500" cy="9144000"/>
@@ -480,7 +481,7 @@
           <a:p>
             <a:fld id="{F7021451-1387-4CA6-816F-3879F97B5CBC}" type="slidenum">
               <a:rPr lang="en-US"/>
-              <a:t>11</a:t>
+              <a:t>12</a:t>
             </a:fld>
             <a:endParaRPr lang="en-US"/>
           </a:p>
@@ -2829,6 +2830,124 @@
 </file>
 
 <file path=ppt/slides/slide11.xml><?xml version="1.0" encoding="utf-8"?>
+<p:sld xmlns:a="http://schemas.openxmlformats.org/drawingml/2006/main" xmlns:r="http://schemas.openxmlformats.org/officeDocument/2006/relationships" xmlns:p="http://schemas.openxmlformats.org/presentationml/2006/main">
+  <p:cSld>
+    <p:spTree>
+      <p:nvGrpSpPr>
+        <p:cNvPr id="1" name=""/>
+        <p:cNvGrpSpPr/>
+        <p:nvPr/>
+      </p:nvGrpSpPr>
+      <p:grpSpPr>
+        <a:xfrm>
+          <a:off x="0" y="0"/>
+          <a:ext cx="0" cy="0"/>
+          <a:chOff x="0" y="0"/>
+          <a:chExt cx="0" cy="0"/>
+        </a:xfrm>
+      </p:grpSpPr>
+      <p:pic>
+        <p:nvPicPr>
+          <p:cNvPr id="3" name="圖片 2">
+            <a:extLst>
+              <a:ext uri="{FF2B5EF4-FFF2-40B4-BE49-F238E27FC236}">
+                <a16:creationId xmlns:a16="http://schemas.microsoft.com/office/drawing/2014/main" id="{33C57C3C-ED32-CBDE-032F-191873A55600}"/>
+              </a:ext>
+            </a:extLst>
+          </p:cNvPr>
+          <p:cNvPicPr>
+            <a:picLocks noChangeAspect="1"/>
+          </p:cNvPicPr>
+          <p:nvPr/>
+        </p:nvPicPr>
+        <p:blipFill>
+          <a:blip r:embed="rId2"/>
+          <a:stretch>
+            <a:fillRect/>
+          </a:stretch>
+        </p:blipFill>
+        <p:spPr>
+          <a:xfrm>
+            <a:off x="268393" y="2350069"/>
+            <a:ext cx="8497486" cy="1857634"/>
+          </a:xfrm>
+          <a:prstGeom prst="rect">
+            <a:avLst/>
+          </a:prstGeom>
+        </p:spPr>
+      </p:pic>
+      <p:sp>
+        <p:nvSpPr>
+          <p:cNvPr id="7" name="Text 0">
+            <a:extLst>
+              <a:ext uri="{FF2B5EF4-FFF2-40B4-BE49-F238E27FC236}">
+                <a16:creationId xmlns:a16="http://schemas.microsoft.com/office/drawing/2014/main" id="{CD2BA132-E35E-A351-EC8C-B0D250079588}"/>
+              </a:ext>
+            </a:extLst>
+          </p:cNvPr>
+          <p:cNvSpPr/>
+          <p:nvPr/>
+        </p:nvSpPr>
+        <p:spPr>
+          <a:xfrm>
+            <a:off x="1743075" y="1683693"/>
+            <a:ext cx="5657850" cy="507831"/>
+          </a:xfrm>
+          <a:prstGeom prst="rect">
+            <a:avLst/>
+          </a:prstGeom>
+          <a:noFill/>
+          <a:ln/>
+        </p:spPr>
+        <p:txBody>
+          <a:bodyPr wrap="square" lIns="0" tIns="0" rIns="0" bIns="0" rtlCol="0" anchor="t">
+            <a:spAutoFit/>
+          </a:bodyPr>
+          <a:lstStyle/>
+          <a:p>
+            <a:pPr marL="0" indent="0" algn="ctr">
+              <a:buNone/>
+            </a:pPr>
+            <a:r>
+              <a:rPr lang="en-US" sz="3300" b="1" kern="0" spc="2" dirty="0">
+                <a:solidFill>
+                  <a:srgbClr val="00F2FF"/>
+                </a:solidFill>
+                <a:latin typeface="Montserrat Bold" pitchFamily="34" charset="0"/>
+                <a:ea typeface="Montserrat Bold" pitchFamily="34" charset="-122"/>
+                <a:cs typeface="Montserrat Bold" pitchFamily="34" charset="-120"/>
+              </a:rPr>
+              <a:t>git</a:t>
+            </a:r>
+            <a:r>
+              <a:rPr lang="zh-TW" altLang="en-US" sz="3300" b="1" kern="0" spc="2" dirty="0">
+                <a:solidFill>
+                  <a:srgbClr val="00F2FF"/>
+                </a:solidFill>
+                <a:latin typeface="Montserrat Bold" pitchFamily="34" charset="0"/>
+                <a:ea typeface="Montserrat Bold" pitchFamily="34" charset="-122"/>
+                <a:cs typeface="Montserrat Bold" pitchFamily="34" charset="-120"/>
+              </a:rPr>
+              <a:t>紀錄</a:t>
+            </a:r>
+            <a:endParaRPr lang="en-US" sz="3300" dirty="0"/>
+          </a:p>
+        </p:txBody>
+      </p:sp>
+    </p:spTree>
+    <p:extLst>
+      <p:ext uri="{BB962C8B-B14F-4D97-AF65-F5344CB8AC3E}">
+        <p14:creationId xmlns:p14="http://schemas.microsoft.com/office/powerpoint/2010/main" val="3939579454"/>
+      </p:ext>
+    </p:extLst>
+  </p:cSld>
+  <p:clrMapOvr>
+    <a:masterClrMapping/>
+  </p:clrMapOvr>
+</p:sld>
+</file>
+
+<file path=ppt/slides/slide12.xml><?xml version="1.0" encoding="utf-8"?>
 <p:sld xmlns:a="http://schemas.openxmlformats.org/drawingml/2006/main" xmlns:r="http://schemas.openxmlformats.org/officeDocument/2006/relationships" xmlns:p="http://schemas.openxmlformats.org/presentationml/2006/main">
   <p:cSld name="Slide 12">
     <p:spTree>
